--- a/classes/parte-4-seguridad-de-aplicaciones-web/089-owasp-zap/clase-089-presentacion.pptx
+++ b/classes/parte-4-seguridad-de-aplicaciones-web/089-owasp-zap/clase-089-presentacion.pptx
@@ -17,6 +17,9 @@
     <p:sldId id="265" r:id="rId16"/>
     <p:sldId id="266" r:id="rId17"/>
     <p:sldId id="267" r:id="rId18"/>
+    <p:sldId id="268" r:id="rId19"/>
+    <p:sldId id="269" r:id="rId20"/>
+    <p:sldId id="270" r:id="rId21"/>
   </p:sldIdLst>
   <p:sldSz cx="9144000" cy="6858000" type="screen4x3"/>
   <p:notesSz cx="6858000" cy="9144000"/>
@@ -3198,7 +3201,7 @@
                   <a:srgbClr val="0B3D2E"/>
                 </a:solidFill>
               </a:rPr>
-              <a:t>⚠️ Errores comunes</a:t>
+              <a:t>✍️ Ejercicios</a:t>
             </a:r>
           </a:p>
         </p:txBody>
@@ -3236,67 +3239,82 @@
                   <a:srgbClr val="22282E"/>
                 </a:solidFill>
               </a:rPr>
-              <a:t>•  Active scan sin resultados en SPA — Faltó el AJAX spider previo</a:t>
-            </a:r>
-          </a:p>
-          <a:p>
-            <a:pPr>
-              <a:spcAft>
-                <a:spcPts val="600"/>
-              </a:spcAft>
-            </a:pPr>
-            <a:r>
-              <a:rPr sz="1500">
-                <a:solidFill>
-                  <a:srgbClr val="22282E"/>
-                </a:solidFill>
-              </a:rPr>
-              <a:t>•  Muchos falsos positivos — Verifica manualmente antes de reportar</a:t>
-            </a:r>
-          </a:p>
-          <a:p>
-            <a:pPr>
-              <a:spcAft>
-                <a:spcPts val="600"/>
-              </a:spcAft>
-            </a:pPr>
-            <a:r>
-              <a:rPr sz="1500">
-                <a:solidFill>
-                  <a:srgbClr val="22282E"/>
-                </a:solidFill>
-              </a:rPr>
-              <a:t>•  HTTPS con errores de certificado — CA de ZAP no instalado</a:t>
-            </a:r>
-          </a:p>
-          <a:p>
-            <a:pPr>
-              <a:spcAft>
-                <a:spcPts val="600"/>
-              </a:spcAft>
-            </a:pPr>
-            <a:r>
-              <a:rPr sz="1500">
-                <a:solidFill>
-                  <a:srgbClr val="22282E"/>
-                </a:solidFill>
-              </a:rPr>
-              <a:t>•  Escaneo bloqueado por WAF/rate limit — Baja el número de hilos del active scan</a:t>
-            </a:r>
-          </a:p>
-          <a:p>
-            <a:pPr>
-              <a:spcAft>
-                <a:spcPts val="600"/>
-              </a:spcAft>
-            </a:pPr>
-            <a:r>
-              <a:rPr sz="1500">
-                <a:solidFill>
-                  <a:srgbClr val="22282E"/>
-                </a:solidFill>
-              </a:rPr>
-              <a:t>•  Baseline scan siempre en verde — El scope o el target están mal definidos</a:t>
+              <a:t>•  Compara el número de URLs descubiertas por spider tradicional vs. AJAX spider.</a:t>
+            </a:r>
+          </a:p>
+          <a:p>
+            <a:pPr>
+              <a:spcAft>
+                <a:spcPts val="600"/>
+              </a:spcAft>
+            </a:pPr>
+            <a:r>
+              <a:rPr sz="1500">
+                <a:solidFill>
+                  <a:srgbClr val="22282E"/>
+                </a:solidFill>
+              </a:rPr>
+              <a:t>•  Configura un Context con credenciales para un escaneo autenticado.</a:t>
+            </a:r>
+          </a:p>
+          <a:p>
+            <a:pPr>
+              <a:spcAft>
+                <a:spcPts val="600"/>
+              </a:spcAft>
+            </a:pPr>
+            <a:r>
+              <a:rPr sz="1500">
+                <a:solidFill>
+                  <a:srgbClr val="22282E"/>
+                </a:solidFill>
+              </a:rPr>
+              <a:t>•  Filtra las alertas por riesgo Alto y explica una de ellas.</a:t>
+            </a:r>
+          </a:p>
+          <a:p>
+            <a:pPr>
+              <a:spcAft>
+                <a:spcPts val="600"/>
+              </a:spcAft>
+            </a:pPr>
+            <a:r>
+              <a:rPr sz="1500">
+                <a:solidFill>
+                  <a:srgbClr val="22282E"/>
+                </a:solidFill>
+              </a:rPr>
+              <a:t>•  Ejecuta el baseline scan e interpreta los códigos WARN/FAIL.</a:t>
+            </a:r>
+          </a:p>
+          <a:p>
+            <a:pPr>
+              <a:spcAft>
+                <a:spcPts val="600"/>
+              </a:spcAft>
+            </a:pPr>
+            <a:r>
+              <a:rPr sz="1500">
+                <a:solidFill>
+                  <a:srgbClr val="22282E"/>
+                </a:solidFill>
+              </a:rPr>
+              <a:t>•  Escribe un script de ZAP que marque como fuera de scope las URLs de logout.</a:t>
+            </a:r>
+          </a:p>
+          <a:p>
+            <a:pPr>
+              <a:spcAft>
+                <a:spcPts val="600"/>
+              </a:spcAft>
+            </a:pPr>
+            <a:r>
+              <a:rPr sz="1500">
+                <a:solidFill>
+                  <a:srgbClr val="22282E"/>
+                </a:solidFill>
+              </a:rPr>
+              <a:t>•  Integra mentalmente el baseline scan en un pipeline: ¿cuándo debe fallar el build?</a:t>
             </a:r>
           </a:p>
         </p:txBody>
@@ -3347,7 +3365,7 @@
                   <a:srgbClr val="0B3D2E"/>
                 </a:solidFill>
               </a:rPr>
-              <a:t>❓ Preguntas frecuentes</a:t>
+              <a:t>📝 Reto verificable</a:t>
             </a:r>
           </a:p>
         </p:txBody>
@@ -3385,82 +3403,22 @@
                   <a:srgbClr val="22282E"/>
                 </a:solidFill>
               </a:rPr>
-              <a:t>•  ❓ ¿ZAP puede sustituir a Burp?</a:t>
-            </a:r>
-          </a:p>
-          <a:p>
-            <a:pPr>
-              <a:spcAft>
-                <a:spcPts val="600"/>
-              </a:spcAft>
-            </a:pPr>
-            <a:r>
-              <a:rPr sz="1500">
-                <a:solidFill>
-                  <a:srgbClr val="22282E"/>
-                </a:solidFill>
-              </a:rPr>
-              <a:t>•  Para automatización y CI/CD, sí, e incluso mejor. Para pentesting manual fino, muchos prefieren Burp.</a:t>
-            </a:r>
-          </a:p>
-          <a:p>
-            <a:pPr>
-              <a:spcAft>
-                <a:spcPts val="600"/>
-              </a:spcAft>
-            </a:pPr>
-            <a:r>
-              <a:rPr sz="1500">
-                <a:solidFill>
-                  <a:srgbClr val="22282E"/>
-                </a:solidFill>
-              </a:rPr>
-              <a:t>•  ❓ ¿El active scan es peligroso?</a:t>
-            </a:r>
-          </a:p>
-          <a:p>
-            <a:pPr>
-              <a:spcAft>
-                <a:spcPts val="600"/>
-              </a:spcAft>
-            </a:pPr>
-            <a:r>
-              <a:rPr sz="1500">
-                <a:solidFill>
-                  <a:srgbClr val="22282E"/>
-                </a:solidFill>
-              </a:rPr>
-              <a:t>•  Envía payloads reales; puede alterar datos. Úsalo solo en entornos autorizados y con backups.</a:t>
-            </a:r>
-          </a:p>
-          <a:p>
-            <a:pPr>
-              <a:spcAft>
-                <a:spcPts val="600"/>
-              </a:spcAft>
-            </a:pPr>
-            <a:r>
-              <a:rPr sz="1500">
-                <a:solidFill>
-                  <a:srgbClr val="22282E"/>
-                </a:solidFill>
-              </a:rPr>
-              <a:t>•  ❓ ¿Cómo integro ZAP en CI/CD?</a:t>
-            </a:r>
-          </a:p>
-          <a:p>
-            <a:pPr>
-              <a:spcAft>
-                <a:spcPts val="600"/>
-              </a:spcAft>
-            </a:pPr>
-            <a:r>
-              <a:rPr sz="1500">
-                <a:solidFill>
-                  <a:srgbClr val="22282E"/>
-                </a:solidFill>
-              </a:rPr>
-              <a:t>•  Con zap-baseline.py o zap-full-scan.py en un contenedor, haciendo que el pipeline falle según las alertas.</a:t>
+              <a:t>•  Genera un reporte de ZAP de Juice Shop que incluya al menos 3 alertas de riesgo medio/alto verificadas manualmente (sin falsos positivos).</a:t>
+            </a:r>
+          </a:p>
+          <a:p>
+            <a:pPr>
+              <a:spcAft>
+                <a:spcPts val="600"/>
+              </a:spcAft>
+            </a:pPr>
+            <a:r>
+              <a:rPr sz="1500">
+                <a:solidFill>
+                  <a:srgbClr val="22282E"/>
+                </a:solidFill>
+              </a:rPr>
+              <a:t>•  Criterio de aceptación: cada alerta del reporte se confirma reproduciéndola manualmente en el navegador o en Burp, y se descarta al menos un falso positivo justificando por qué.</a:t>
             </a:r>
           </a:p>
         </p:txBody>
@@ -3511,7 +3469,7 @@
                   <a:srgbClr val="0B3D2E"/>
                 </a:solidFill>
               </a:rPr>
-              <a:t>🔗 Referencias</a:t>
+              <a:t>⚠️ Errores comunes</a:t>
             </a:r>
           </a:p>
         </p:txBody>
@@ -3549,6 +3507,319 @@
                   <a:srgbClr val="22282E"/>
                 </a:solidFill>
               </a:rPr>
+              <a:t>•  Active scan sin resultados en SPA — Faltó el AJAX spider previo</a:t>
+            </a:r>
+          </a:p>
+          <a:p>
+            <a:pPr>
+              <a:spcAft>
+                <a:spcPts val="600"/>
+              </a:spcAft>
+            </a:pPr>
+            <a:r>
+              <a:rPr sz="1500">
+                <a:solidFill>
+                  <a:srgbClr val="22282E"/>
+                </a:solidFill>
+              </a:rPr>
+              <a:t>•  Muchos falsos positivos — Verifica manualmente antes de reportar</a:t>
+            </a:r>
+          </a:p>
+          <a:p>
+            <a:pPr>
+              <a:spcAft>
+                <a:spcPts val="600"/>
+              </a:spcAft>
+            </a:pPr>
+            <a:r>
+              <a:rPr sz="1500">
+                <a:solidFill>
+                  <a:srgbClr val="22282E"/>
+                </a:solidFill>
+              </a:rPr>
+              <a:t>•  HTTPS con errores de certificado — CA de ZAP no instalado</a:t>
+            </a:r>
+          </a:p>
+          <a:p>
+            <a:pPr>
+              <a:spcAft>
+                <a:spcPts val="600"/>
+              </a:spcAft>
+            </a:pPr>
+            <a:r>
+              <a:rPr sz="1500">
+                <a:solidFill>
+                  <a:srgbClr val="22282E"/>
+                </a:solidFill>
+              </a:rPr>
+              <a:t>•  Escaneo bloqueado por WAF/rate limit — Baja el número de hilos del active scan</a:t>
+            </a:r>
+          </a:p>
+          <a:p>
+            <a:pPr>
+              <a:spcAft>
+                <a:spcPts val="600"/>
+              </a:spcAft>
+            </a:pPr>
+            <a:r>
+              <a:rPr sz="1500">
+                <a:solidFill>
+                  <a:srgbClr val="22282E"/>
+                </a:solidFill>
+              </a:rPr>
+              <a:t>•  Baseline scan siempre en verde — El scope o el target están mal definidos</a:t>
+            </a:r>
+          </a:p>
+        </p:txBody>
+      </p:sp>
+    </p:spTree>
+  </p:cSld>
+  <p:clrMapOvr>
+    <a:masterClrMapping/>
+  </p:clrMapOvr>
+</p:sld>
+</file>
+
+<file path=ppt/slides/slide13.xml><?xml version="1.0" encoding="utf-8"?>
+<p:sld xmlns:a="http://schemas.openxmlformats.org/drawingml/2006/main" xmlns:p="http://schemas.openxmlformats.org/presentationml/2006/main" xmlns:r="http://schemas.openxmlformats.org/officeDocument/2006/relationships">
+  <p:cSld>
+    <p:spTree>
+      <p:nvGrpSpPr>
+        <p:cNvPr id="1" name=""/>
+        <p:cNvGrpSpPr/>
+        <p:nvPr/>
+      </p:nvGrpSpPr>
+      <p:grpSpPr/>
+      <p:sp>
+        <p:nvSpPr>
+          <p:cNvPr id="2" name="TextBox 1"/>
+          <p:cNvSpPr txBox="1"/>
+          <p:nvPr/>
+        </p:nvSpPr>
+        <p:spPr>
+          <a:xfrm>
+            <a:off x="457200" y="320040"/>
+            <a:ext cx="8229600" cy="822960"/>
+          </a:xfrm>
+          <a:prstGeom prst="rect">
+            <a:avLst/>
+          </a:prstGeom>
+          <a:noFill/>
+        </p:spPr>
+        <p:txBody>
+          <a:bodyPr wrap="square">
+            <a:spAutoFit/>
+          </a:bodyPr>
+          <a:lstStyle/>
+          <a:p>
+            <a:r>
+              <a:rPr sz="2600" b="1">
+                <a:solidFill>
+                  <a:srgbClr val="0B3D2E"/>
+                </a:solidFill>
+              </a:rPr>
+              <a:t>❓ Preguntas frecuentes</a:t>
+            </a:r>
+          </a:p>
+        </p:txBody>
+      </p:sp>
+      <p:sp>
+        <p:nvSpPr>
+          <p:cNvPr id="3" name="TextBox 2"/>
+          <p:cNvSpPr txBox="1"/>
+          <p:nvPr/>
+        </p:nvSpPr>
+        <p:spPr>
+          <a:xfrm>
+            <a:off x="457200" y="1280160"/>
+            <a:ext cx="8229600" cy="4937760"/>
+          </a:xfrm>
+          <a:prstGeom prst="rect">
+            <a:avLst/>
+          </a:prstGeom>
+          <a:noFill/>
+        </p:spPr>
+        <p:txBody>
+          <a:bodyPr wrap="square">
+            <a:spAutoFit/>
+          </a:bodyPr>
+          <a:lstStyle/>
+          <a:p>
+            <a:pPr>
+              <a:spcAft>
+                <a:spcPts val="600"/>
+              </a:spcAft>
+            </a:pPr>
+            <a:r>
+              <a:rPr sz="1500">
+                <a:solidFill>
+                  <a:srgbClr val="22282E"/>
+                </a:solidFill>
+              </a:rPr>
+              <a:t>•  ❓ ¿ZAP puede sustituir a Burp?</a:t>
+            </a:r>
+          </a:p>
+          <a:p>
+            <a:pPr>
+              <a:spcAft>
+                <a:spcPts val="600"/>
+              </a:spcAft>
+            </a:pPr>
+            <a:r>
+              <a:rPr sz="1500">
+                <a:solidFill>
+                  <a:srgbClr val="22282E"/>
+                </a:solidFill>
+              </a:rPr>
+              <a:t>•  Para automatización y CI/CD, sí, e incluso mejor. Para pentesting manual fino, muchos prefieren Burp.</a:t>
+            </a:r>
+          </a:p>
+          <a:p>
+            <a:pPr>
+              <a:spcAft>
+                <a:spcPts val="600"/>
+              </a:spcAft>
+            </a:pPr>
+            <a:r>
+              <a:rPr sz="1500">
+                <a:solidFill>
+                  <a:srgbClr val="22282E"/>
+                </a:solidFill>
+              </a:rPr>
+              <a:t>•  ❓ ¿El active scan es peligroso?</a:t>
+            </a:r>
+          </a:p>
+          <a:p>
+            <a:pPr>
+              <a:spcAft>
+                <a:spcPts val="600"/>
+              </a:spcAft>
+            </a:pPr>
+            <a:r>
+              <a:rPr sz="1500">
+                <a:solidFill>
+                  <a:srgbClr val="22282E"/>
+                </a:solidFill>
+              </a:rPr>
+              <a:t>•  Envía payloads reales; puede alterar datos. Úsalo solo en entornos autorizados y con backups.</a:t>
+            </a:r>
+          </a:p>
+          <a:p>
+            <a:pPr>
+              <a:spcAft>
+                <a:spcPts val="600"/>
+              </a:spcAft>
+            </a:pPr>
+            <a:r>
+              <a:rPr sz="1500">
+                <a:solidFill>
+                  <a:srgbClr val="22282E"/>
+                </a:solidFill>
+              </a:rPr>
+              <a:t>•  ❓ ¿Cómo integro ZAP en CI/CD?</a:t>
+            </a:r>
+          </a:p>
+          <a:p>
+            <a:pPr>
+              <a:spcAft>
+                <a:spcPts val="600"/>
+              </a:spcAft>
+            </a:pPr>
+            <a:r>
+              <a:rPr sz="1500">
+                <a:solidFill>
+                  <a:srgbClr val="22282E"/>
+                </a:solidFill>
+              </a:rPr>
+              <a:t>•  Con zap-baseline.py o zap-full-scan.py en un contenedor, haciendo que el pipeline falle según las alertas.</a:t>
+            </a:r>
+          </a:p>
+        </p:txBody>
+      </p:sp>
+    </p:spTree>
+  </p:cSld>
+  <p:clrMapOvr>
+    <a:masterClrMapping/>
+  </p:clrMapOvr>
+</p:sld>
+</file>
+
+<file path=ppt/slides/slide14.xml><?xml version="1.0" encoding="utf-8"?>
+<p:sld xmlns:a="http://schemas.openxmlformats.org/drawingml/2006/main" xmlns:p="http://schemas.openxmlformats.org/presentationml/2006/main" xmlns:r="http://schemas.openxmlformats.org/officeDocument/2006/relationships">
+  <p:cSld>
+    <p:spTree>
+      <p:nvGrpSpPr>
+        <p:cNvPr id="1" name=""/>
+        <p:cNvGrpSpPr/>
+        <p:nvPr/>
+      </p:nvGrpSpPr>
+      <p:grpSpPr/>
+      <p:sp>
+        <p:nvSpPr>
+          <p:cNvPr id="2" name="TextBox 1"/>
+          <p:cNvSpPr txBox="1"/>
+          <p:nvPr/>
+        </p:nvSpPr>
+        <p:spPr>
+          <a:xfrm>
+            <a:off x="457200" y="320040"/>
+            <a:ext cx="8229600" cy="822960"/>
+          </a:xfrm>
+          <a:prstGeom prst="rect">
+            <a:avLst/>
+          </a:prstGeom>
+          <a:noFill/>
+        </p:spPr>
+        <p:txBody>
+          <a:bodyPr wrap="square">
+            <a:spAutoFit/>
+          </a:bodyPr>
+          <a:lstStyle/>
+          <a:p>
+            <a:r>
+              <a:rPr sz="2600" b="1">
+                <a:solidFill>
+                  <a:srgbClr val="0B3D2E"/>
+                </a:solidFill>
+              </a:rPr>
+              <a:t>🔗 Referencias</a:t>
+            </a:r>
+          </a:p>
+        </p:txBody>
+      </p:sp>
+      <p:sp>
+        <p:nvSpPr>
+          <p:cNvPr id="3" name="TextBox 2"/>
+          <p:cNvSpPr txBox="1"/>
+          <p:nvPr/>
+        </p:nvSpPr>
+        <p:spPr>
+          <a:xfrm>
+            <a:off x="457200" y="1280160"/>
+            <a:ext cx="8229600" cy="4937760"/>
+          </a:xfrm>
+          <a:prstGeom prst="rect">
+            <a:avLst/>
+          </a:prstGeom>
+          <a:noFill/>
+        </p:spPr>
+        <p:txBody>
+          <a:bodyPr wrap="square">
+            <a:spAutoFit/>
+          </a:bodyPr>
+          <a:lstStyle/>
+          <a:p>
+            <a:pPr>
+              <a:spcAft>
+                <a:spcPts val="600"/>
+              </a:spcAft>
+            </a:pPr>
+            <a:r>
+              <a:rPr sz="1500">
+                <a:solidFill>
+                  <a:srgbClr val="22282E"/>
+                </a:solidFill>
+              </a:rPr>
               <a:t>•  OWASP ZAP: &lt;https://www.zaproxy.org/&gt;</a:t>
             </a:r>
           </a:p>
@@ -3584,6 +3855,81 @@
           </a:p>
         </p:txBody>
       </p:sp>
+    </p:spTree>
+  </p:cSld>
+  <p:clrMapOvr>
+    <a:masterClrMapping/>
+  </p:clrMapOvr>
+</p:sld>
+</file>
+
+<file path=ppt/slides/slide15.xml><?xml version="1.0" encoding="utf-8"?>
+<p:sld xmlns:a="http://schemas.openxmlformats.org/drawingml/2006/main" xmlns:p="http://schemas.openxmlformats.org/presentationml/2006/main" xmlns:r="http://schemas.openxmlformats.org/officeDocument/2006/relationships">
+  <p:cSld>
+    <p:spTree>
+      <p:nvGrpSpPr>
+        <p:cNvPr id="1" name=""/>
+        <p:cNvGrpSpPr/>
+        <p:nvPr/>
+      </p:nvGrpSpPr>
+      <p:grpSpPr/>
+      <p:sp>
+        <p:nvSpPr>
+          <p:cNvPr id="2" name="TextBox 1"/>
+          <p:cNvSpPr txBox="1"/>
+          <p:nvPr/>
+        </p:nvSpPr>
+        <p:spPr>
+          <a:xfrm>
+            <a:off x="457200" y="274320"/>
+            <a:ext cx="8229600" cy="640080"/>
+          </a:xfrm>
+          <a:prstGeom prst="rect">
+            <a:avLst/>
+          </a:prstGeom>
+          <a:noFill/>
+        </p:spPr>
+        <p:txBody>
+          <a:bodyPr wrap="square">
+            <a:spAutoFit/>
+          </a:bodyPr>
+          <a:lstStyle/>
+          <a:p>
+            <a:r>
+              <a:rPr sz="2200" b="1">
+                <a:solidFill>
+                  <a:srgbClr val="0B3D2E"/>
+                </a:solidFill>
+              </a:rPr>
+              <a:t>Diagrama de la clase</a:t>
+            </a:r>
+          </a:p>
+        </p:txBody>
+      </p:sp>
+      <p:pic>
+        <p:nvPicPr>
+          <p:cNvPr id="3" name="Picture 2" descr="6ac108c6d9650b48.png"/>
+          <p:cNvPicPr>
+            <a:picLocks noChangeAspect="1"/>
+          </p:cNvPicPr>
+          <p:nvPr/>
+        </p:nvPicPr>
+        <p:blipFill>
+          <a:blip r:embed="rId2"/>
+          <a:stretch>
+            <a:fillRect/>
+          </a:stretch>
+        </p:blipFill>
+        <p:spPr>
+          <a:xfrm>
+            <a:off x="457200" y="1485900"/>
+            <a:ext cx="8229600" cy="4526280"/>
+          </a:xfrm>
+          <a:prstGeom prst="rect">
+            <a:avLst/>
+          </a:prstGeom>
+        </p:spPr>
+      </p:pic>
     </p:spTree>
   </p:cSld>
   <p:clrMapOvr>
@@ -3668,7 +4014,7 @@
                   <a:srgbClr val="22282E"/>
                 </a:solidFill>
               </a:rPr>
-              <a:t>•  Dominar OWASP ZAP (Zed Attack Proxy), la alternativa libre y de código abierto a Burp, con foco en su capacidad de automatización (spider, active scan, ZAP en CI/CD). Complementa a Burp: ZAP brilla en escaneo automatizado y en pipelines DevSecOps.</a:t>
+              <a:t>•  Dominar OWASP ZAP (Zed Attack Proxy), la alternativa libre y de código abierto a Burp, con foco en su capacidad de automatización (spider, active scan, ZAP en CI/CD). Complementa a Burp: ZAP brilla…</a:t>
             </a:r>
           </a:p>
         </p:txBody>
@@ -4062,7 +4408,7 @@
                   <a:srgbClr val="0B3D2E"/>
                 </a:solidFill>
               </a:rPr>
-              <a:t>📖 Definiciones y características</a:t>
+              <a:t>🧠 Explicación en profundidad</a:t>
             </a:r>
           </a:p>
         </p:txBody>
@@ -4100,82 +4446,97 @@
                   <a:srgbClr val="22282E"/>
                 </a:solidFill>
               </a:rPr>
-              <a:t>•  ZAP: proxy de seguridad web libre mantenido por OWASP. Característica: gratuito, scriptable y apto para CI/CD.</a:t>
-            </a:r>
-          </a:p>
-          <a:p>
-            <a:pPr>
-              <a:spcAft>
-                <a:spcPts val="600"/>
-              </a:spcAft>
-            </a:pPr>
-            <a:r>
-              <a:rPr sz="1500">
-                <a:solidFill>
-                  <a:srgbClr val="22282E"/>
-                </a:solidFill>
-              </a:rPr>
-              <a:t>•  Spider: rastreador que descubre URLs siguiendo enlaces. Característica: no ejecuta JavaScript.</a:t>
-            </a:r>
-          </a:p>
-          <a:p>
-            <a:pPr>
-              <a:spcAft>
-                <a:spcPts val="600"/>
-              </a:spcAft>
-            </a:pPr>
-            <a:r>
-              <a:rPr sz="1500">
-                <a:solidFill>
-                  <a:srgbClr val="22282E"/>
-                </a:solidFill>
-              </a:rPr>
-              <a:t>•  AJAX Spider: rastreador que usa un navegador real para SPAs. Característica: descubre rutas generadas por JS.</a:t>
-            </a:r>
-          </a:p>
-          <a:p>
-            <a:pPr>
-              <a:spcAft>
-                <a:spcPts val="600"/>
-              </a:spcAft>
-            </a:pPr>
-            <a:r>
-              <a:rPr sz="1500">
-                <a:solidFill>
-                  <a:srgbClr val="22282E"/>
-                </a:solidFill>
-              </a:rPr>
-              <a:t>•  Passive scan: análisis no intrusivo del tráfico observado. Característica: seguro, no envía payloads.</a:t>
-            </a:r>
-          </a:p>
-          <a:p>
-            <a:pPr>
-              <a:spcAft>
-                <a:spcPts val="600"/>
-              </a:spcAft>
-            </a:pPr>
-            <a:r>
-              <a:rPr sz="1500">
-                <a:solidFill>
-                  <a:srgbClr val="22282E"/>
-                </a:solidFill>
-              </a:rPr>
-              <a:t>•  Active scan: envía payloads para confirmar vulnerabilidades. Característica: intrusivo, solo con autorización.</a:t>
-            </a:r>
-          </a:p>
-          <a:p>
-            <a:pPr>
-              <a:spcAft>
-                <a:spcPts val="600"/>
-              </a:spcAft>
-            </a:pPr>
-            <a:r>
-              <a:rPr sz="1500">
-                <a:solidFill>
-                  <a:srgbClr val="22282E"/>
-                </a:solidFill>
-              </a:rPr>
-              <a:t>•  Baseline scan: escaneo rápido y no intrusivo pensado para CI. Característica: falla el build si hay alertas nuevas.</a:t>
+              <a:t>•  OWASP ZAP (Zed Attack Proxy) es el equivalente libre y gratuito de Burp, mantenido por</a:t>
+            </a:r>
+          </a:p>
+          <a:p>
+            <a:pPr>
+              <a:spcAft>
+                <a:spcPts val="600"/>
+              </a:spcAft>
+            </a:pPr>
+            <a:r>
+              <a:rPr sz="1500">
+                <a:solidFill>
+                  <a:srgbClr val="22282E"/>
+                </a:solidFill>
+              </a:rPr>
+              <a:t>•  la comunidad OWASP. Comparte el concepto central —un proxy de interceptación que ve y modifica</a:t>
+            </a:r>
+          </a:p>
+          <a:p>
+            <a:pPr>
+              <a:spcAft>
+                <a:spcPts val="600"/>
+              </a:spcAft>
+            </a:pPr>
+            <a:r>
+              <a:rPr sz="1500">
+                <a:solidFill>
+                  <a:srgbClr val="22282E"/>
+                </a:solidFill>
+              </a:rPr>
+              <a:t>•  el tráfico— y por eso mucho de la clase 088 se traslada directamente: también genera una CA</a:t>
+            </a:r>
+          </a:p>
+          <a:p>
+            <a:pPr>
+              <a:spcAft>
+                <a:spcPts val="600"/>
+              </a:spcAft>
+            </a:pPr>
+            <a:r>
+              <a:rPr sz="1500">
+                <a:solidFill>
+                  <a:srgbClr val="22282E"/>
+                </a:solidFill>
+              </a:rPr>
+              <a:t>•  que hay que instalar para HTTPS, también tiene target, sitemap e interceptación manual. La</a:t>
+            </a:r>
+          </a:p>
+          <a:p>
+            <a:pPr>
+              <a:spcAft>
+                <a:spcPts val="600"/>
+              </a:spcAft>
+            </a:pPr>
+            <a:r>
+              <a:rPr sz="1500">
+                <a:solidFill>
+                  <a:srgbClr val="22282E"/>
+                </a:solidFill>
+              </a:rPr>
+              <a:t>•  razón de estudiarlo no es solo tener una opción sin coste, sino que ZAP brilla donde Burp</a:t>
+            </a:r>
+          </a:p>
+          <a:p>
+            <a:pPr>
+              <a:spcAft>
+                <a:spcPts val="600"/>
+              </a:spcAft>
+            </a:pPr>
+            <a:r>
+              <a:rPr sz="1500">
+                <a:solidFill>
+                  <a:srgbClr val="22282E"/>
+                </a:solidFill>
+              </a:rPr>
+              <a:t>•  Community flaquea: en automatización. Su escaneo activo es completo y sin las limitaciones</a:t>
+            </a:r>
+          </a:p>
+          <a:p>
+            <a:pPr>
+              <a:spcAft>
+                <a:spcPts val="600"/>
+              </a:spcAft>
+            </a:pPr>
+            <a:r>
+              <a:rPr sz="1500">
+                <a:solidFill>
+                  <a:srgbClr val="22282E"/>
+                </a:solidFill>
+              </a:rPr>
+              <a:t>•  de velocidad de la edición gratuita de Burp, y su Automation Framework lo hace idóneo para</a:t>
             </a:r>
           </a:p>
         </p:txBody>
@@ -4226,7 +4587,7 @@
                   <a:srgbClr val="0B3D2E"/>
                 </a:solidFill>
               </a:rPr>
-              <a:t>🧰 Herramientas y preparación</a:t>
+              <a:t>📖 Definiciones y características</a:t>
             </a:r>
           </a:p>
         </p:txBody>
@@ -4264,37 +4625,82 @@
                   <a:srgbClr val="22282E"/>
                 </a:solidFill>
               </a:rPr>
-              <a:t>•  OWASP ZAP (descarga oficial) o su imagen Docker zaproxy/zap-stable.</a:t>
-            </a:r>
-          </a:p>
-          <a:p>
-            <a:pPr>
-              <a:spcAft>
-                <a:spcPts val="600"/>
-              </a:spcAft>
-            </a:pPr>
-            <a:r>
-              <a:rPr sz="1500">
-                <a:solidFill>
-                  <a:srgbClr val="22282E"/>
-                </a:solidFill>
-              </a:rPr>
-              <a:t>•  Laboratorio: Juice Shop en http://localhost:3000.</a:t>
-            </a:r>
-          </a:p>
-          <a:p>
-            <a:pPr>
-              <a:spcAft>
-                <a:spcPts val="600"/>
-              </a:spcAft>
-            </a:pPr>
-            <a:r>
-              <a:rPr sz="1500">
-                <a:solidFill>
-                  <a:srgbClr val="22282E"/>
-                </a:solidFill>
-              </a:rPr>
-              <a:t>•  docker run --rm -t zaproxy/zap-stable zap-baseline.py -t http://host.docker.internal:3000</a:t>
+              <a:t>•  ZAP: proxy de seguridad web libre mantenido por OWASP. Característica: gratuito, scriptable y apto para CI/CD.</a:t>
+            </a:r>
+          </a:p>
+          <a:p>
+            <a:pPr>
+              <a:spcAft>
+                <a:spcPts val="600"/>
+              </a:spcAft>
+            </a:pPr>
+            <a:r>
+              <a:rPr sz="1500">
+                <a:solidFill>
+                  <a:srgbClr val="22282E"/>
+                </a:solidFill>
+              </a:rPr>
+              <a:t>•  Spider: rastreador que descubre URLs siguiendo enlaces. Característica: no ejecuta JavaScript.</a:t>
+            </a:r>
+          </a:p>
+          <a:p>
+            <a:pPr>
+              <a:spcAft>
+                <a:spcPts val="600"/>
+              </a:spcAft>
+            </a:pPr>
+            <a:r>
+              <a:rPr sz="1500">
+                <a:solidFill>
+                  <a:srgbClr val="22282E"/>
+                </a:solidFill>
+              </a:rPr>
+              <a:t>•  AJAX Spider: rastreador que usa un navegador real para SPAs. Característica: descubre rutas generadas por JS.</a:t>
+            </a:r>
+          </a:p>
+          <a:p>
+            <a:pPr>
+              <a:spcAft>
+                <a:spcPts val="600"/>
+              </a:spcAft>
+            </a:pPr>
+            <a:r>
+              <a:rPr sz="1500">
+                <a:solidFill>
+                  <a:srgbClr val="22282E"/>
+                </a:solidFill>
+              </a:rPr>
+              <a:t>•  Passive scan: análisis no intrusivo del tráfico observado. Característica: seguro, no envía payloads.</a:t>
+            </a:r>
+          </a:p>
+          <a:p>
+            <a:pPr>
+              <a:spcAft>
+                <a:spcPts val="600"/>
+              </a:spcAft>
+            </a:pPr>
+            <a:r>
+              <a:rPr sz="1500">
+                <a:solidFill>
+                  <a:srgbClr val="22282E"/>
+                </a:solidFill>
+              </a:rPr>
+              <a:t>•  Active scan: envía payloads para confirmar vulnerabilidades. Característica: intrusivo, solo con autorización.</a:t>
+            </a:r>
+          </a:p>
+          <a:p>
+            <a:pPr>
+              <a:spcAft>
+                <a:spcPts val="600"/>
+              </a:spcAft>
+            </a:pPr>
+            <a:r>
+              <a:rPr sz="1500">
+                <a:solidFill>
+                  <a:srgbClr val="22282E"/>
+                </a:solidFill>
+              </a:rPr>
+              <a:t>•  Baseline scan: escaneo rápido y no intrusivo pensado para CI. Característica: falla el build si hay alertas nuevas.</a:t>
             </a:r>
           </a:p>
         </p:txBody>
@@ -4345,7 +4751,7 @@
                   <a:srgbClr val="0B3D2E"/>
                 </a:solidFill>
               </a:rPr>
-              <a:t>🧪 Laboratorio guiado</a:t>
+              <a:t>📔 Glosario</a:t>
             </a:r>
           </a:p>
         </p:txBody>
@@ -4383,97 +4789,97 @@
                   <a:srgbClr val="22282E"/>
                 </a:solidFill>
               </a:rPr>
-              <a:t>•  Instala ZAP y arranca en modo Standard. Configura el proxy local (por defecto 8080 o 8090).</a:t>
-            </a:r>
-          </a:p>
-          <a:p>
-            <a:pPr>
-              <a:spcAft>
-                <a:spcPts val="600"/>
-              </a:spcAft>
-            </a:pPr>
-            <a:r>
-              <a:rPr sz="1500">
-                <a:solidFill>
-                  <a:srgbClr val="22282E"/>
-                </a:solidFill>
-              </a:rPr>
-              <a:t>•  Instala el certificado raíz de ZAP en el navegador (Options → Network → Server Certificates).</a:t>
-            </a:r>
-          </a:p>
-          <a:p>
-            <a:pPr>
-              <a:spcAft>
-                <a:spcPts val="600"/>
-              </a:spcAft>
-            </a:pPr>
-            <a:r>
-              <a:rPr sz="1500">
-                <a:solidFill>
-                  <a:srgbClr val="22282E"/>
-                </a:solidFill>
-              </a:rPr>
-              <a:t>•  Explora Juice Shop manualmente pasando por ZAP para poblar el árbol de sitios.</a:t>
-            </a:r>
-          </a:p>
-          <a:p>
-            <a:pPr>
-              <a:spcAft>
-                <a:spcPts val="600"/>
-              </a:spcAft>
-            </a:pPr>
-            <a:r>
-              <a:rPr sz="1500">
-                <a:solidFill>
-                  <a:srgbClr val="22282E"/>
-                </a:solidFill>
-              </a:rPr>
-              <a:t>•  Lanza el Spider sobre el host y luego el AJAX Spider para capturar rutas de la SPA.</a:t>
-            </a:r>
-          </a:p>
-          <a:p>
-            <a:pPr>
-              <a:spcAft>
-                <a:spcPts val="600"/>
-              </a:spcAft>
-            </a:pPr>
-            <a:r>
-              <a:rPr sz="1500">
-                <a:solidFill>
-                  <a:srgbClr val="22282E"/>
-                </a:solidFill>
-              </a:rPr>
-              <a:t>•  Revisa las alertas del passive scan que ya se generaron.</a:t>
-            </a:r>
-          </a:p>
-          <a:p>
-            <a:pPr>
-              <a:spcAft>
-                <a:spcPts val="600"/>
-              </a:spcAft>
-            </a:pPr>
-            <a:r>
-              <a:rPr sz="1500">
-                <a:solidFill>
-                  <a:srgbClr val="22282E"/>
-                </a:solidFill>
-              </a:rPr>
-              <a:t>•  Lanza un Active Scan sobre un endpoint concreto y observa las alertas por color de riesgo.</a:t>
-            </a:r>
-          </a:p>
-          <a:p>
-            <a:pPr>
-              <a:spcAft>
-                <a:spcPts val="600"/>
-              </a:spcAft>
-            </a:pPr>
-            <a:r>
-              <a:rPr sz="1500">
-                <a:solidFill>
-                  <a:srgbClr val="22282E"/>
-                </a:solidFill>
-              </a:rPr>
-              <a:t>•  Ejecuta un baseline scan con Docker y revisa el reporte de warnings.</a:t>
+              <a:t>•  Término — Definición concisa</a:t>
+            </a:r>
+          </a:p>
+          <a:p>
+            <a:pPr>
+              <a:spcAft>
+                <a:spcPts val="600"/>
+              </a:spcAft>
+            </a:pPr>
+            <a:r>
+              <a:rPr sz="1500">
+                <a:solidFill>
+                  <a:srgbClr val="22282E"/>
+                </a:solidFill>
+              </a:rPr>
+              <a:t>•  OWASP ZAP — Proxy de pentesting web libre y gratuito de OWASP</a:t>
+            </a:r>
+          </a:p>
+          <a:p>
+            <a:pPr>
+              <a:spcAft>
+                <a:spcPts val="600"/>
+              </a:spcAft>
+            </a:pPr>
+            <a:r>
+              <a:rPr sz="1500">
+                <a:solidFill>
+                  <a:srgbClr val="22282E"/>
+                </a:solidFill>
+              </a:rPr>
+              <a:t>•  CA de ZAP — Certificado propio para interceptar HTTPS</a:t>
+            </a:r>
+          </a:p>
+          <a:p>
+            <a:pPr>
+              <a:spcAft>
+                <a:spcPts val="600"/>
+              </a:spcAft>
+            </a:pPr>
+            <a:r>
+              <a:rPr sz="1500">
+                <a:solidFill>
+                  <a:srgbClr val="22282E"/>
+                </a:solidFill>
+              </a:rPr>
+              <a:t>•  Spider tradicional — Descubre páginas siguiendo enlaces del HTML</a:t>
+            </a:r>
+          </a:p>
+          <a:p>
+            <a:pPr>
+              <a:spcAft>
+                <a:spcPts val="600"/>
+              </a:spcAft>
+            </a:pPr>
+            <a:r>
+              <a:rPr sz="1500">
+                <a:solidFill>
+                  <a:srgbClr val="22282E"/>
+                </a:solidFill>
+              </a:rPr>
+              <a:t>•  AJAX Spider — Ejecuta JS con un navegador real para descubrir rutas de SPA</a:t>
+            </a:r>
+          </a:p>
+          <a:p>
+            <a:pPr>
+              <a:spcAft>
+                <a:spcPts val="600"/>
+              </a:spcAft>
+            </a:pPr>
+            <a:r>
+              <a:rPr sz="1500">
+                <a:solidFill>
+                  <a:srgbClr val="22282E"/>
+                </a:solidFill>
+              </a:rPr>
+              <a:t>•  Escaneo pasivo — Solo observa el tráfico; no envía nada; seguro</a:t>
+            </a:r>
+          </a:p>
+          <a:p>
+            <a:pPr>
+              <a:spcAft>
+                <a:spcPts val="600"/>
+              </a:spcAft>
+            </a:pPr>
+            <a:r>
+              <a:rPr sz="1500">
+                <a:solidFill>
+                  <a:srgbClr val="22282E"/>
+                </a:solidFill>
+              </a:rPr>
+              <a:t>•  Escaneo activo — Envía payloads de prueba; intrusivo; solo dentro del scope</a:t>
             </a:r>
           </a:p>
         </p:txBody>
@@ -4524,7 +4930,7 @@
                   <a:srgbClr val="0B3D2E"/>
                 </a:solidFill>
               </a:rPr>
-              <a:t>✍️ Ejercicios</a:t>
+              <a:t>🧰 Herramientas y preparación</a:t>
             </a:r>
           </a:p>
         </p:txBody>
@@ -4562,82 +4968,22 @@
                   <a:srgbClr val="22282E"/>
                 </a:solidFill>
               </a:rPr>
-              <a:t>•  Compara el número de URLs descubiertas por spider tradicional vs. AJAX spider.</a:t>
-            </a:r>
-          </a:p>
-          <a:p>
-            <a:pPr>
-              <a:spcAft>
-                <a:spcPts val="600"/>
-              </a:spcAft>
-            </a:pPr>
-            <a:r>
-              <a:rPr sz="1500">
-                <a:solidFill>
-                  <a:srgbClr val="22282E"/>
-                </a:solidFill>
-              </a:rPr>
-              <a:t>•  Configura un Context con credenciales para un escaneo autenticado.</a:t>
-            </a:r>
-          </a:p>
-          <a:p>
-            <a:pPr>
-              <a:spcAft>
-                <a:spcPts val="600"/>
-              </a:spcAft>
-            </a:pPr>
-            <a:r>
-              <a:rPr sz="1500">
-                <a:solidFill>
-                  <a:srgbClr val="22282E"/>
-                </a:solidFill>
-              </a:rPr>
-              <a:t>•  Filtra las alertas por riesgo Alto y explica una de ellas.</a:t>
-            </a:r>
-          </a:p>
-          <a:p>
-            <a:pPr>
-              <a:spcAft>
-                <a:spcPts val="600"/>
-              </a:spcAft>
-            </a:pPr>
-            <a:r>
-              <a:rPr sz="1500">
-                <a:solidFill>
-                  <a:srgbClr val="22282E"/>
-                </a:solidFill>
-              </a:rPr>
-              <a:t>•  Ejecuta el baseline scan e interpreta los códigos WARN/FAIL.</a:t>
-            </a:r>
-          </a:p>
-          <a:p>
-            <a:pPr>
-              <a:spcAft>
-                <a:spcPts val="600"/>
-              </a:spcAft>
-            </a:pPr>
-            <a:r>
-              <a:rPr sz="1500">
-                <a:solidFill>
-                  <a:srgbClr val="22282E"/>
-                </a:solidFill>
-              </a:rPr>
-              <a:t>•  Escribe un script de ZAP que marque como fuera de scope las URLs de logout.</a:t>
-            </a:r>
-          </a:p>
-          <a:p>
-            <a:pPr>
-              <a:spcAft>
-                <a:spcPts val="600"/>
-              </a:spcAft>
-            </a:pPr>
-            <a:r>
-              <a:rPr sz="1500">
-                <a:solidFill>
-                  <a:srgbClr val="22282E"/>
-                </a:solidFill>
-              </a:rPr>
-              <a:t>•  Integra mentalmente el baseline scan en un pipeline: ¿cuándo debe fallar el build?</a:t>
+              <a:t>•  OWASP ZAP (descarga oficial) o su imagen Docker zaproxy/zap-stable.</a:t>
+            </a:r>
+          </a:p>
+          <a:p>
+            <a:pPr>
+              <a:spcAft>
+                <a:spcPts val="600"/>
+              </a:spcAft>
+            </a:pPr>
+            <a:r>
+              <a:rPr sz="1500">
+                <a:solidFill>
+                  <a:srgbClr val="22282E"/>
+                </a:solidFill>
+              </a:rPr>
+              <a:t>•  Laboratorio: Juice Shop en http://localhost:3000.</a:t>
             </a:r>
           </a:p>
         </p:txBody>
@@ -4688,7 +5034,7 @@
                   <a:srgbClr val="0B3D2E"/>
                 </a:solidFill>
               </a:rPr>
-              <a:t>📝 Reto verificable</a:t>
+              <a:t>🧪 Laboratorio guiado</a:t>
             </a:r>
           </a:p>
         </p:txBody>
@@ -4726,22 +5072,97 @@
                   <a:srgbClr val="22282E"/>
                 </a:solidFill>
               </a:rPr>
-              <a:t>•  Genera un reporte de ZAP de Juice Shop que incluya al menos 3 alertas de riesgo medio/alto verificadas manualmente (sin falsos positivos).</a:t>
-            </a:r>
-          </a:p>
-          <a:p>
-            <a:pPr>
-              <a:spcAft>
-                <a:spcPts val="600"/>
-              </a:spcAft>
-            </a:pPr>
-            <a:r>
-              <a:rPr sz="1500">
-                <a:solidFill>
-                  <a:srgbClr val="22282E"/>
-                </a:solidFill>
-              </a:rPr>
-              <a:t>•  Criterio de aceptación: cada alerta del reporte se confirma reproduciéndola manualmente en el navegador o en Burp, y se descarta al menos un falso positivo justificando por qué.</a:t>
+              <a:t>•  Instala ZAP y arranca en modo Standard. Configura el proxy local (por defecto 8080 o 8090).</a:t>
+            </a:r>
+          </a:p>
+          <a:p>
+            <a:pPr>
+              <a:spcAft>
+                <a:spcPts val="600"/>
+              </a:spcAft>
+            </a:pPr>
+            <a:r>
+              <a:rPr sz="1500">
+                <a:solidFill>
+                  <a:srgbClr val="22282E"/>
+                </a:solidFill>
+              </a:rPr>
+              <a:t>•  Instala el certificado raíz de ZAP en el navegador (Options → Network → Server Certificates).</a:t>
+            </a:r>
+          </a:p>
+          <a:p>
+            <a:pPr>
+              <a:spcAft>
+                <a:spcPts val="600"/>
+              </a:spcAft>
+            </a:pPr>
+            <a:r>
+              <a:rPr sz="1500">
+                <a:solidFill>
+                  <a:srgbClr val="22282E"/>
+                </a:solidFill>
+              </a:rPr>
+              <a:t>•  Explora Juice Shop manualmente pasando por ZAP para poblar el árbol de sitios.</a:t>
+            </a:r>
+          </a:p>
+          <a:p>
+            <a:pPr>
+              <a:spcAft>
+                <a:spcPts val="600"/>
+              </a:spcAft>
+            </a:pPr>
+            <a:r>
+              <a:rPr sz="1500">
+                <a:solidFill>
+                  <a:srgbClr val="22282E"/>
+                </a:solidFill>
+              </a:rPr>
+              <a:t>•  Lanza el Spider sobre el host y luego el AJAX Spider para capturar rutas de la SPA.</a:t>
+            </a:r>
+          </a:p>
+          <a:p>
+            <a:pPr>
+              <a:spcAft>
+                <a:spcPts val="600"/>
+              </a:spcAft>
+            </a:pPr>
+            <a:r>
+              <a:rPr sz="1500">
+                <a:solidFill>
+                  <a:srgbClr val="22282E"/>
+                </a:solidFill>
+              </a:rPr>
+              <a:t>•  Revisa las alertas del passive scan que ya se generaron.</a:t>
+            </a:r>
+          </a:p>
+          <a:p>
+            <a:pPr>
+              <a:spcAft>
+                <a:spcPts val="600"/>
+              </a:spcAft>
+            </a:pPr>
+            <a:r>
+              <a:rPr sz="1500">
+                <a:solidFill>
+                  <a:srgbClr val="22282E"/>
+                </a:solidFill>
+              </a:rPr>
+              <a:t>•  Lanza un Active Scan sobre un endpoint concreto y observa las alertas por color de riesgo.</a:t>
+            </a:r>
+          </a:p>
+          <a:p>
+            <a:pPr>
+              <a:spcAft>
+                <a:spcPts val="600"/>
+              </a:spcAft>
+            </a:pPr>
+            <a:r>
+              <a:rPr sz="1500">
+                <a:solidFill>
+                  <a:srgbClr val="22282E"/>
+                </a:solidFill>
+              </a:rPr>
+              <a:t>•  Ejecuta un baseline scan con Docker y revisa el reporte de warnings.</a:t>
             </a:r>
           </a:p>
         </p:txBody>
